--- a/set/2026-07-05 El Camino Baptist Church-CH.pptx
+++ b/set/2026-07-05 El Camino Baptist Church-CH.pptx
@@ -6178,6 +6178,19 @@
           <a:lstStyle/>
           <a:p>
             <a:pPr algn="l"/>
+            <a:r>
+              <a:rPr lang="en-US" sz="3600" dirty="0">
+                <a:solidFill>
+                  <a:srgbClr val="FFFF00"/>
+                </a:solidFill>
+                <a:latin typeface="Avenir Medium" panose="02000503020000020003" pitchFamily="2" charset="0"/>
+                <a:ea typeface="Bodoni Ornaments" pitchFamily="2" charset="0"/>
+              </a:rPr>
+              <a:t>G/ C</a:t>
+            </a:r>
+          </a:p>
+          <a:p>
+            <a:pPr algn="l"/>
             <a:endParaRPr lang="en-US" sz="3600" dirty="0">
               <a:solidFill>
                 <a:srgbClr val="FFFF00"/>
@@ -6196,7 +6209,7 @@
                 <a:latin typeface="Avenir Medium" panose="02000503020000020003" pitchFamily="2" charset="0"/>
                 <a:ea typeface="Bodoni Ornaments" pitchFamily="2" charset="0"/>
               </a:rPr>
-              <a:t>                C            D             G</a:t>
+              <a:t>G               C            D             G</a:t>
             </a:r>
           </a:p>
           <a:p>
@@ -9008,7 +9021,7 @@
     </p:spTree>
     <p:extLst>
       <p:ext uri="{BB962C8B-B14F-4D97-AF65-F5344CB8AC3E}">
-        <p14:creationId xmlns:p14="http://schemas.microsoft.com/office/powerpoint/2010/main" val="2346738168"/>
+        <p14:creationId xmlns:p14="http://schemas.microsoft.com/office/powerpoint/2010/main" val="2156211220"/>
       </p:ext>
     </p:extLst>
   </p:cSld>
@@ -9383,7 +9396,7 @@
                 <a:latin typeface="Avenir Medium" panose="02000503020000020003" pitchFamily="2" charset="0"/>
                 <a:ea typeface="Bodoni Ornaments" pitchFamily="2" charset="0"/>
               </a:rPr>
-              <a:t>   C                            F               C</a:t>
+              <a:t>   G                            C               G</a:t>
             </a:r>
           </a:p>
           <a:p>
@@ -9409,7 +9422,7 @@
                 <a:latin typeface="Avenir Medium" panose="02000503020000020003" pitchFamily="2" charset="0"/>
                 <a:ea typeface="Bodoni Ornaments" pitchFamily="2" charset="0"/>
               </a:rPr>
-              <a:t>        C                              G</a:t>
+              <a:t>        G                              D</a:t>
             </a:r>
           </a:p>
           <a:p>
@@ -9435,7 +9448,7 @@
                 <a:latin typeface="Avenir Medium" panose="02000503020000020003" pitchFamily="2" charset="0"/>
                 <a:ea typeface="Bodoni Ornaments" pitchFamily="2" charset="0"/>
               </a:rPr>
-              <a:t>  C                           F                   C</a:t>
+              <a:t>  G                           C                   G</a:t>
             </a:r>
           </a:p>
           <a:p>
@@ -9461,7 +9474,7 @@
                 <a:latin typeface="Avenir Medium" panose="02000503020000020003" pitchFamily="2" charset="0"/>
                 <a:ea typeface="Bodoni Ornaments" pitchFamily="2" charset="0"/>
               </a:rPr>
-              <a:t>        C             G        C</a:t>
+              <a:t>        G             D        G</a:t>
             </a:r>
           </a:p>
           <a:p>
@@ -9482,7 +9495,7 @@
     </p:spTree>
     <p:extLst>
       <p:ext uri="{BB962C8B-B14F-4D97-AF65-F5344CB8AC3E}">
-        <p14:creationId xmlns:p14="http://schemas.microsoft.com/office/powerpoint/2010/main" val="805495114"/>
+        <p14:creationId xmlns:p14="http://schemas.microsoft.com/office/powerpoint/2010/main" val="3294726612"/>
       </p:ext>
     </p:extLst>
   </p:cSld>
@@ -9570,7 +9583,7 @@
                 <a:latin typeface="Avenir Medium" panose="02000503020000020003" pitchFamily="2" charset="0"/>
                 <a:ea typeface="Bodoni Ornaments" pitchFamily="2" charset="0"/>
               </a:rPr>
-              <a:t>          G                                  F           C</a:t>
+              <a:t>          G                                  C           G</a:t>
             </a:r>
           </a:p>
           <a:p>
@@ -9606,7 +9619,7 @@
                 <a:latin typeface="Avenir Medium" panose="02000503020000020003" pitchFamily="2" charset="0"/>
                 <a:ea typeface="Bodoni Ornaments" pitchFamily="2" charset="0"/>
               </a:rPr>
-              <a:t>C                        G</a:t>
+              <a:t>G                                D</a:t>
             </a:r>
           </a:p>
           <a:p>
@@ -9632,7 +9645,7 @@
                 <a:latin typeface="Avenir Medium" panose="02000503020000020003" pitchFamily="2" charset="0"/>
                 <a:ea typeface="Bodoni Ornaments" pitchFamily="2" charset="0"/>
               </a:rPr>
-              <a:t>          C                         F             C</a:t>
+              <a:t>          G                         C             G</a:t>
             </a:r>
           </a:p>
           <a:p>
@@ -9658,7 +9671,7 @@
                 <a:latin typeface="Avenir Medium" panose="02000503020000020003" pitchFamily="2" charset="0"/>
                 <a:ea typeface="Bodoni Ornaments" pitchFamily="2" charset="0"/>
               </a:rPr>
-              <a:t>       C         G          C</a:t>
+              <a:t>       G         D          G</a:t>
             </a:r>
           </a:p>
           <a:p>
@@ -9767,7 +9780,7 @@
                 <a:latin typeface="Avenir Medium" panose="02000503020000020003" pitchFamily="2" charset="0"/>
                 <a:ea typeface="Bodoni Ornaments" pitchFamily="2" charset="0"/>
               </a:rPr>
-              <a:t>                 C                   F             C</a:t>
+              <a:t>                 G                   C             G</a:t>
             </a:r>
           </a:p>
           <a:p>
@@ -9793,7 +9806,7 @@
                 <a:latin typeface="Avenir Medium" panose="02000503020000020003" pitchFamily="2" charset="0"/>
                 <a:ea typeface="Bodoni Ornaments" pitchFamily="2" charset="0"/>
               </a:rPr>
-              <a:t>   C                  G</a:t>
+              <a:t>   G                  D</a:t>
             </a:r>
           </a:p>
           <a:p>
@@ -9819,7 +9832,7 @@
                 <a:latin typeface="Avenir Medium" panose="02000503020000020003" pitchFamily="2" charset="0"/>
                 <a:ea typeface="Bodoni Ornaments" pitchFamily="2" charset="0"/>
               </a:rPr>
-              <a:t>       C               F                   C</a:t>
+              <a:t>       G               C                   G</a:t>
             </a:r>
           </a:p>
           <a:p>
@@ -9845,7 +9858,7 @@
                 <a:latin typeface="Avenir Medium" panose="02000503020000020003" pitchFamily="2" charset="0"/>
                 <a:ea typeface="Bodoni Ornaments" pitchFamily="2" charset="0"/>
               </a:rPr>
-              <a:t>        C              G           C</a:t>
+              <a:t>        G              D           G</a:t>
             </a:r>
           </a:p>
           <a:p>
@@ -9954,7 +9967,7 @@
                 <a:latin typeface="Avenir Medium" panose="02000503020000020003" pitchFamily="2" charset="0"/>
                 <a:ea typeface="Bodoni Ornaments" pitchFamily="2" charset="0"/>
               </a:rPr>
-              <a:t>       C                             F            C</a:t>
+              <a:t>       G                             C            G</a:t>
             </a:r>
           </a:p>
           <a:p>
@@ -9980,7 +9993,7 @@
                 <a:latin typeface="Avenir Medium" panose="02000503020000020003" pitchFamily="2" charset="0"/>
                 <a:ea typeface="Bodoni Ornaments" pitchFamily="2" charset="0"/>
               </a:rPr>
-              <a:t>       C                      G</a:t>
+              <a:t>       G                      D</a:t>
             </a:r>
           </a:p>
           <a:p>
@@ -10006,7 +10019,7 @@
                 <a:latin typeface="Avenir Medium" panose="02000503020000020003" pitchFamily="2" charset="0"/>
                 <a:ea typeface="Bodoni Ornaments" pitchFamily="2" charset="0"/>
               </a:rPr>
-              <a:t>       C                           F          C</a:t>
+              <a:t>       G                           C          G</a:t>
             </a:r>
           </a:p>
           <a:p>
@@ -10032,7 +10045,7 @@
                 <a:latin typeface="Avenir Medium" panose="02000503020000020003" pitchFamily="2" charset="0"/>
                 <a:ea typeface="Bodoni Ornaments" pitchFamily="2" charset="0"/>
               </a:rPr>
-              <a:t>     C          G           C</a:t>
+              <a:t>     G          D           G</a:t>
             </a:r>
           </a:p>
           <a:p>

--- a/set/2026-07-05 El Camino Baptist Church-CH.pptx
+++ b/set/2026-07-05 El Camino Baptist Church-CH.pptx
@@ -291,7 +291,7 @@
           <a:p>
             <a:fld id="{E759A0DE-F190-5444-87AC-4719D5F20D15}" type="datetimeFigureOut">
               <a:rPr lang="en-US" smtClean="0"/>
-              <a:t>7/4/26</a:t>
+              <a:t>7/5/26</a:t>
             </a:fld>
             <a:endParaRPr lang="en-US"/>
           </a:p>
@@ -489,7 +489,7 @@
           <a:p>
             <a:fld id="{E759A0DE-F190-5444-87AC-4719D5F20D15}" type="datetimeFigureOut">
               <a:rPr lang="en-US" smtClean="0"/>
-              <a:t>7/4/26</a:t>
+              <a:t>7/5/26</a:t>
             </a:fld>
             <a:endParaRPr lang="en-US"/>
           </a:p>
@@ -697,7 +697,7 @@
           <a:p>
             <a:fld id="{E759A0DE-F190-5444-87AC-4719D5F20D15}" type="datetimeFigureOut">
               <a:rPr lang="en-US" smtClean="0"/>
-              <a:t>7/4/26</a:t>
+              <a:t>7/5/26</a:t>
             </a:fld>
             <a:endParaRPr lang="en-US"/>
           </a:p>
@@ -895,7 +895,7 @@
           <a:p>
             <a:fld id="{E759A0DE-F190-5444-87AC-4719D5F20D15}" type="datetimeFigureOut">
               <a:rPr lang="en-US" smtClean="0"/>
-              <a:t>7/4/26</a:t>
+              <a:t>7/5/26</a:t>
             </a:fld>
             <a:endParaRPr lang="en-US"/>
           </a:p>
@@ -1170,7 +1170,7 @@
           <a:p>
             <a:fld id="{E759A0DE-F190-5444-87AC-4719D5F20D15}" type="datetimeFigureOut">
               <a:rPr lang="en-US" smtClean="0"/>
-              <a:t>7/4/26</a:t>
+              <a:t>7/5/26</a:t>
             </a:fld>
             <a:endParaRPr lang="en-US"/>
           </a:p>
@@ -1435,7 +1435,7 @@
           <a:p>
             <a:fld id="{E759A0DE-F190-5444-87AC-4719D5F20D15}" type="datetimeFigureOut">
               <a:rPr lang="en-US" smtClean="0"/>
-              <a:t>7/4/26</a:t>
+              <a:t>7/5/26</a:t>
             </a:fld>
             <a:endParaRPr lang="en-US"/>
           </a:p>
@@ -1847,7 +1847,7 @@
           <a:p>
             <a:fld id="{E759A0DE-F190-5444-87AC-4719D5F20D15}" type="datetimeFigureOut">
               <a:rPr lang="en-US" smtClean="0"/>
-              <a:t>7/4/26</a:t>
+              <a:t>7/5/26</a:t>
             </a:fld>
             <a:endParaRPr lang="en-US"/>
           </a:p>
@@ -1988,7 +1988,7 @@
           <a:p>
             <a:fld id="{E759A0DE-F190-5444-87AC-4719D5F20D15}" type="datetimeFigureOut">
               <a:rPr lang="en-US" smtClean="0"/>
-              <a:t>7/4/26</a:t>
+              <a:t>7/5/26</a:t>
             </a:fld>
             <a:endParaRPr lang="en-US"/>
           </a:p>
@@ -2101,7 +2101,7 @@
           <a:p>
             <a:fld id="{E759A0DE-F190-5444-87AC-4719D5F20D15}" type="datetimeFigureOut">
               <a:rPr lang="en-US" smtClean="0"/>
-              <a:t>7/4/26</a:t>
+              <a:t>7/5/26</a:t>
             </a:fld>
             <a:endParaRPr lang="en-US"/>
           </a:p>
@@ -2412,7 +2412,7 @@
           <a:p>
             <a:fld id="{E759A0DE-F190-5444-87AC-4719D5F20D15}" type="datetimeFigureOut">
               <a:rPr lang="en-US" smtClean="0"/>
-              <a:t>7/4/26</a:t>
+              <a:t>7/5/26</a:t>
             </a:fld>
             <a:endParaRPr lang="en-US"/>
           </a:p>
@@ -2700,7 +2700,7 @@
           <a:p>
             <a:fld id="{E759A0DE-F190-5444-87AC-4719D5F20D15}" type="datetimeFigureOut">
               <a:rPr lang="en-US" smtClean="0"/>
-              <a:t>7/4/26</a:t>
+              <a:t>7/5/26</a:t>
             </a:fld>
             <a:endParaRPr lang="en-US"/>
           </a:p>
@@ -2941,7 +2941,7 @@
           <a:p>
             <a:fld id="{E759A0DE-F190-5444-87AC-4719D5F20D15}" type="datetimeFigureOut">
               <a:rPr lang="en-US" smtClean="0"/>
-              <a:t>7/4/26</a:t>
+              <a:t>7/5/26</a:t>
             </a:fld>
             <a:endParaRPr lang="en-US"/>
           </a:p>
@@ -8510,6 +8510,45 @@
                 <a:ea typeface="Bodoni Ornaments" pitchFamily="2" charset="0"/>
               </a:rPr>
               <a:t>I will sing of the goodness of God</a:t>
+            </a:r>
+          </a:p>
+        </p:txBody>
+      </p:sp>
+      <p:sp>
+        <p:nvSpPr>
+          <p:cNvPr id="2" name="TextBox 1">
+            <a:extLst>
+              <a:ext uri="{FF2B5EF4-FFF2-40B4-BE49-F238E27FC236}">
+                <a16:creationId xmlns:a16="http://schemas.microsoft.com/office/drawing/2014/main" id="{F6EA5F1A-0B6E-9702-40F3-D5F667A15513}"/>
+              </a:ext>
+            </a:extLst>
+          </p:cNvPr>
+          <p:cNvSpPr txBox="1"/>
+          <p:nvPr/>
+        </p:nvSpPr>
+        <p:spPr>
+          <a:xfrm>
+            <a:off x="10800521" y="6150114"/>
+            <a:ext cx="1210588" cy="707886"/>
+          </a:xfrm>
+          <a:prstGeom prst="rect">
+            <a:avLst/>
+          </a:prstGeom>
+          <a:noFill/>
+        </p:spPr>
+        <p:txBody>
+          <a:bodyPr wrap="none" rtlCol="0">
+            <a:spAutoFit/>
+          </a:bodyPr>
+          <a:lstStyle/>
+          <a:p>
+            <a:r>
+              <a:rPr lang="en-US" sz="4000" b="1" dirty="0">
+                <a:solidFill>
+                  <a:srgbClr val="FFFF00"/>
+                </a:solidFill>
+              </a:rPr>
+              <a:t>END</a:t>
             </a:r>
           </a:p>
         </p:txBody>
